--- a/PPT/MagicFridge_PPT.pptx
+++ b/PPT/MagicFridge_PPT.pptx
@@ -803,7 +803,7 @@
       </p:grpSpPr>
       <p:sp>
         <p:nvSpPr>
-          <p:cNvPr id="372" name="PlaceHolder 1"/>
+          <p:cNvPr id="366" name="PlaceHolder 1"/>
           <p:cNvSpPr>
             <a:spLocks noGrp="1" noRot="1" noChangeAspect="1"/>
           </p:cNvSpPr>
@@ -826,7 +826,7 @@
       </p:sp>
       <p:sp>
         <p:nvSpPr>
-          <p:cNvPr id="373" name="PlaceHolder 2"/>
+          <p:cNvPr id="367" name="PlaceHolder 2"/>
           <p:cNvSpPr>
             <a:spLocks noGrp="1"/>
           </p:cNvSpPr>
@@ -853,35 +853,30 @@
           </a:bodyPr>
           <a:lstStyle/>
           <a:p>
-            <a:pPr marL="216000" indent="0">
-              <a:lnSpc>
-                <a:spcPct val="100000"/>
-              </a:lnSpc>
+            <a:pPr marL="216000" indent="-216000">
               <a:buNone/>
-              <a:tabLst>
-                <a:tab pos="0" algn="l"/>
-              </a:tabLst>
-            </a:pPr>
-            <a:r>
-              <a:rPr lang="hu-HU" sz="2000" b="0" strike="noStrike" spc="-1">
-                <a:solidFill>
-                  <a:srgbClr val="000000"/>
-                </a:solidFill>
-                <a:latin typeface="Arial"/>
-              </a:rPr>
-              <a:t>A bevásárlólista részben kézi felvitellel, részben receptből származó hiányzó tételekből épül. Mivel a lista közösen használható, a háztartás tagjai egymás munkáját is látják, így kevesebb a kimaradó tétel. A vásárlás emiatt gyorsabb, tervezettebb és költséghatékonyabb lesz.</a:t>
-            </a:r>
-          </a:p>
-        </p:txBody>
-      </p:sp>
-      <p:sp>
-        <p:nvSpPr>
-          <p:cNvPr id="374" name="PlaceHolder 3"/>
+            </a:pPr>
+            <a:r>
+              <a:rPr lang="hu-HU" sz="1800" dirty="0"/>
+              <a:t>A raktárkezelő modul lehetővé teszi a háztartási készletek strukturált nyilvántartását, beleértve a termékek mennyiségének, kategóriájának és tárolási helyének kezelését. A rendszer támogatja a lejárati idő rögzítését és automatikus értesítéseket küld a közelgő lejáratokról, ezzel csökkentve a pazarlást és növelve az átláthatóságot. Az intuitív felület gyors adatbevitelt és hatékony készletkövetést biztosít a felhasználók számára.</a:t>
+            </a:r>
+            <a:endParaRPr lang="hu-HU" sz="1800" b="0" strike="noStrike" spc="-1" dirty="0">
+              <a:solidFill>
+                <a:srgbClr val="000000"/>
+              </a:solidFill>
+              <a:latin typeface="Arial"/>
+            </a:endParaRPr>
+          </a:p>
+        </p:txBody>
+      </p:sp>
+      <p:sp>
+        <p:nvSpPr>
+          <p:cNvPr id="368" name="PlaceHolder 3"/>
           <p:cNvSpPr>
             <a:spLocks noGrp="1"/>
           </p:cNvSpPr>
           <p:nvPr>
-            <p:ph type="sldNum" idx="13"/>
+            <p:ph type="sldNum" idx="11"/>
           </p:nvPr>
         </p:nvSpPr>
         <p:spPr>
@@ -929,7 +924,7 @@
                 <a:tab pos="0" algn="l"/>
               </a:tabLst>
             </a:pPr>
-            <a:fld id="{F4A4473F-211D-4344-AEEC-38E194F41D00}" type="slidenum">
+            <a:fld id="{437B96C4-8782-4684-9367-2BFEB3021B85}" type="slidenum">
               <a:rPr lang="en-US" sz="1800" b="0" strike="noStrike" spc="-1">
                 <a:solidFill>
                   <a:schemeClr val="dk1"/>
@@ -937,7 +932,7 @@
                 <a:latin typeface="+mn-lt"/>
                 <a:ea typeface="+mn-ea"/>
               </a:rPr>
-              <a:t>13</a:t>
+              <a:t>11</a:t>
             </a:fld>
             <a:endParaRPr lang="hu-HU" sz="1800" b="0" strike="noStrike" spc="-1">
               <a:solidFill>
@@ -975,6 +970,474 @@
       </p:grpSpPr>
       <p:sp>
         <p:nvSpPr>
+          <p:cNvPr id="369" name="PlaceHolder 1"/>
+          <p:cNvSpPr>
+            <a:spLocks noGrp="1" noRot="1" noChangeAspect="1"/>
+          </p:cNvSpPr>
+          <p:nvPr>
+            <p:ph type="sldImg"/>
+          </p:nvPr>
+        </p:nvSpPr>
+        <p:spPr>
+          <a:xfrm>
+            <a:off x="0" y="0"/>
+            <a:ext cx="0" cy="0"/>
+          </a:xfrm>
+          <a:prstGeom prst="rect">
+            <a:avLst/>
+          </a:prstGeom>
+          <a:ln w="0">
+            <a:noFill/>
+          </a:ln>
+        </p:spPr>
+      </p:sp>
+      <p:sp>
+        <p:nvSpPr>
+          <p:cNvPr id="370" name="PlaceHolder 2"/>
+          <p:cNvSpPr>
+            <a:spLocks noGrp="1"/>
+          </p:cNvSpPr>
+          <p:nvPr>
+            <p:ph type="body"/>
+          </p:nvPr>
+        </p:nvSpPr>
+        <p:spPr>
+          <a:xfrm>
+            <a:off x="0" y="0"/>
+            <a:ext cx="0" cy="0"/>
+          </a:xfrm>
+          <a:prstGeom prst="rect">
+            <a:avLst/>
+          </a:prstGeom>
+          <a:noFill/>
+          <a:ln w="0">
+            <a:noFill/>
+          </a:ln>
+        </p:spPr>
+        <p:txBody>
+          <a:bodyPr lIns="90000" tIns="-45000" rIns="90000" bIns="-45000" anchor="t">
+            <a:noAutofit/>
+          </a:bodyPr>
+          <a:lstStyle/>
+          <a:p>
+            <a:pPr marL="216000" indent="0">
+              <a:lnSpc>
+                <a:spcPct val="100000"/>
+              </a:lnSpc>
+              <a:buNone/>
+              <a:tabLst>
+                <a:tab pos="0" algn="l"/>
+              </a:tabLst>
+            </a:pPr>
+            <a:r>
+              <a:rPr lang="hu-HU" sz="2000" b="0" strike="noStrike" spc="-1">
+                <a:solidFill>
+                  <a:srgbClr val="000000"/>
+                </a:solidFill>
+                <a:latin typeface="Arial"/>
+              </a:rPr>
+              <a:t>A receptmodulban saját receptek és külső API-ból érkező receptek is kezelhetők. A rendszer a recept hozzávalóit összeveti az aktuális készlettel, és megmutatja, mi hiányzik. Ez főzés előtt pontos képet ad, és segít abban, hogy célzottan vásároljunk, ne "biztonságból" mindent pluszban.</a:t>
+            </a:r>
+          </a:p>
+        </p:txBody>
+      </p:sp>
+      <p:sp>
+        <p:nvSpPr>
+          <p:cNvPr id="371" name="PlaceHolder 3"/>
+          <p:cNvSpPr>
+            <a:spLocks noGrp="1"/>
+          </p:cNvSpPr>
+          <p:nvPr>
+            <p:ph type="sldNum" idx="12"/>
+          </p:nvPr>
+        </p:nvSpPr>
+        <p:spPr>
+          <a:xfrm>
+            <a:off x="0" y="0"/>
+            <a:ext cx="0" cy="0"/>
+          </a:xfrm>
+          <a:prstGeom prst="rect">
+            <a:avLst/>
+          </a:prstGeom>
+          <a:noFill/>
+          <a:ln w="0">
+            <a:noFill/>
+          </a:ln>
+        </p:spPr>
+        <p:txBody>
+          <a:bodyPr lIns="90000" tIns="-45000" rIns="90000" bIns="-45000" anchor="t">
+            <a:noAutofit/>
+          </a:bodyPr>
+          <a:lstStyle>
+            <a:lvl1pPr indent="0" algn="r" defTabSz="914400">
+              <a:lnSpc>
+                <a:spcPct val="100000"/>
+              </a:lnSpc>
+              <a:buNone/>
+              <a:tabLst>
+                <a:tab pos="0" algn="l"/>
+              </a:tabLst>
+              <a:defRPr lang="en-US" sz="1800" b="0" strike="noStrike" spc="-1">
+                <a:solidFill>
+                  <a:schemeClr val="dk1"/>
+                </a:solidFill>
+                <a:latin typeface="+mn-lt"/>
+                <a:ea typeface="+mn-ea"/>
+              </a:defRPr>
+            </a:lvl1pPr>
+          </a:lstStyle>
+          <a:p>
+            <a:pPr indent="0" algn="r" defTabSz="914400">
+              <a:lnSpc>
+                <a:spcPct val="100000"/>
+              </a:lnSpc>
+              <a:buNone/>
+              <a:tabLst>
+                <a:tab pos="0" algn="l"/>
+              </a:tabLst>
+            </a:pPr>
+            <a:fld id="{68D65B0F-0079-4DE9-9BF0-0C9AB3F17167}" type="slidenum">
+              <a:rPr lang="en-US" sz="1800" b="0" strike="noStrike" spc="-1">
+                <a:solidFill>
+                  <a:schemeClr val="dk1"/>
+                </a:solidFill>
+                <a:latin typeface="+mn-lt"/>
+                <a:ea typeface="+mn-ea"/>
+              </a:rPr>
+              <a:t>12</a:t>
+            </a:fld>
+            <a:endParaRPr lang="hu-HU" sz="1800" b="0" strike="noStrike" spc="-1">
+              <a:solidFill>
+                <a:srgbClr val="000000"/>
+              </a:solidFill>
+              <a:latin typeface="Times New Roman"/>
+            </a:endParaRPr>
+          </a:p>
+        </p:txBody>
+      </p:sp>
+    </p:spTree>
+  </p:cSld>
+  <p:clrMapOvr>
+    <a:masterClrMapping/>
+  </p:clrMapOvr>
+</p:notes>
+</file>
+
+<file path=ppt/notesSlides/notesSlide12.xml><?xml version="1.0" encoding="utf-8"?>
+<p:notes xmlns:a="http://schemas.openxmlformats.org/drawingml/2006/main" xmlns:r="http://schemas.openxmlformats.org/officeDocument/2006/relationships" xmlns:p="http://schemas.openxmlformats.org/presentationml/2006/main">
+  <p:cSld>
+    <p:spTree>
+      <p:nvGrpSpPr>
+        <p:cNvPr id="1" name=""/>
+        <p:cNvGrpSpPr/>
+        <p:nvPr/>
+      </p:nvGrpSpPr>
+      <p:grpSpPr>
+        <a:xfrm>
+          <a:off x="0" y="0"/>
+          <a:ext cx="0" cy="0"/>
+          <a:chOff x="0" y="0"/>
+          <a:chExt cx="0" cy="0"/>
+        </a:xfrm>
+      </p:grpSpPr>
+      <p:sp>
+        <p:nvSpPr>
+          <p:cNvPr id="372" name="PlaceHolder 1"/>
+          <p:cNvSpPr>
+            <a:spLocks noGrp="1" noRot="1" noChangeAspect="1"/>
+          </p:cNvSpPr>
+          <p:nvPr>
+            <p:ph type="sldImg"/>
+          </p:nvPr>
+        </p:nvSpPr>
+        <p:spPr>
+          <a:xfrm>
+            <a:off x="0" y="0"/>
+            <a:ext cx="0" cy="0"/>
+          </a:xfrm>
+          <a:prstGeom prst="rect">
+            <a:avLst/>
+          </a:prstGeom>
+          <a:ln w="0">
+            <a:noFill/>
+          </a:ln>
+        </p:spPr>
+      </p:sp>
+      <p:sp>
+        <p:nvSpPr>
+          <p:cNvPr id="373" name="PlaceHolder 2"/>
+          <p:cNvSpPr>
+            <a:spLocks noGrp="1"/>
+          </p:cNvSpPr>
+          <p:nvPr>
+            <p:ph type="body"/>
+          </p:nvPr>
+        </p:nvSpPr>
+        <p:spPr>
+          <a:xfrm>
+            <a:off x="0" y="0"/>
+            <a:ext cx="0" cy="0"/>
+          </a:xfrm>
+          <a:prstGeom prst="rect">
+            <a:avLst/>
+          </a:prstGeom>
+          <a:noFill/>
+          <a:ln w="0">
+            <a:noFill/>
+          </a:ln>
+        </p:spPr>
+        <p:txBody>
+          <a:bodyPr lIns="90000" tIns="-45000" rIns="90000" bIns="-45000" anchor="t">
+            <a:noAutofit/>
+          </a:bodyPr>
+          <a:lstStyle/>
+          <a:p>
+            <a:pPr marL="216000" indent="0">
+              <a:lnSpc>
+                <a:spcPct val="100000"/>
+              </a:lnSpc>
+              <a:buNone/>
+              <a:tabLst>
+                <a:tab pos="0" algn="l"/>
+              </a:tabLst>
+            </a:pPr>
+            <a:r>
+              <a:rPr lang="hu-HU" sz="2000" b="0" strike="noStrike" spc="-1">
+                <a:solidFill>
+                  <a:srgbClr val="000000"/>
+                </a:solidFill>
+                <a:latin typeface="Arial"/>
+              </a:rPr>
+              <a:t>A bevásárlólista részben kézi felvitellel, részben receptből származó hiányzó tételekből épül. Mivel a lista közösen használható, a háztartás tagjai egymás munkáját is látják, így kevesebb a kimaradó tétel. A vásárlás emiatt gyorsabb, tervezettebb és költséghatékonyabb lesz.</a:t>
+            </a:r>
+          </a:p>
+        </p:txBody>
+      </p:sp>
+      <p:sp>
+        <p:nvSpPr>
+          <p:cNvPr id="374" name="PlaceHolder 3"/>
+          <p:cNvSpPr>
+            <a:spLocks noGrp="1"/>
+          </p:cNvSpPr>
+          <p:nvPr>
+            <p:ph type="sldNum" idx="13"/>
+          </p:nvPr>
+        </p:nvSpPr>
+        <p:spPr>
+          <a:xfrm>
+            <a:off x="0" y="0"/>
+            <a:ext cx="0" cy="0"/>
+          </a:xfrm>
+          <a:prstGeom prst="rect">
+            <a:avLst/>
+          </a:prstGeom>
+          <a:noFill/>
+          <a:ln w="0">
+            <a:noFill/>
+          </a:ln>
+        </p:spPr>
+        <p:txBody>
+          <a:bodyPr lIns="90000" tIns="-45000" rIns="90000" bIns="-45000" anchor="t">
+            <a:noAutofit/>
+          </a:bodyPr>
+          <a:lstStyle>
+            <a:lvl1pPr indent="0" algn="r" defTabSz="914400">
+              <a:lnSpc>
+                <a:spcPct val="100000"/>
+              </a:lnSpc>
+              <a:buNone/>
+              <a:tabLst>
+                <a:tab pos="0" algn="l"/>
+              </a:tabLst>
+              <a:defRPr lang="en-US" sz="1800" b="0" strike="noStrike" spc="-1">
+                <a:solidFill>
+                  <a:schemeClr val="dk1"/>
+                </a:solidFill>
+                <a:latin typeface="+mn-lt"/>
+                <a:ea typeface="+mn-ea"/>
+              </a:defRPr>
+            </a:lvl1pPr>
+          </a:lstStyle>
+          <a:p>
+            <a:pPr indent="0" algn="r" defTabSz="914400">
+              <a:lnSpc>
+                <a:spcPct val="100000"/>
+              </a:lnSpc>
+              <a:buNone/>
+              <a:tabLst>
+                <a:tab pos="0" algn="l"/>
+              </a:tabLst>
+            </a:pPr>
+            <a:fld id="{F4A4473F-211D-4344-AEEC-38E194F41D00}" type="slidenum">
+              <a:rPr lang="en-US" sz="1800" b="0" strike="noStrike" spc="-1">
+                <a:solidFill>
+                  <a:schemeClr val="dk1"/>
+                </a:solidFill>
+                <a:latin typeface="+mn-lt"/>
+                <a:ea typeface="+mn-ea"/>
+              </a:rPr>
+              <a:t>13</a:t>
+            </a:fld>
+            <a:endParaRPr lang="hu-HU" sz="1800" b="0" strike="noStrike" spc="-1">
+              <a:solidFill>
+                <a:srgbClr val="000000"/>
+              </a:solidFill>
+              <a:latin typeface="Times New Roman"/>
+            </a:endParaRPr>
+          </a:p>
+        </p:txBody>
+      </p:sp>
+    </p:spTree>
+  </p:cSld>
+  <p:clrMapOvr>
+    <a:masterClrMapping/>
+  </p:clrMapOvr>
+</p:notes>
+</file>
+
+<file path=ppt/notesSlides/notesSlide13.xml><?xml version="1.0" encoding="utf-8"?>
+<p:notes xmlns:a="http://schemas.openxmlformats.org/drawingml/2006/main" xmlns:r="http://schemas.openxmlformats.org/officeDocument/2006/relationships" xmlns:p="http://schemas.openxmlformats.org/presentationml/2006/main">
+  <p:cSld>
+    <p:spTree>
+      <p:nvGrpSpPr>
+        <p:cNvPr id="1" name=""/>
+        <p:cNvGrpSpPr/>
+        <p:nvPr/>
+      </p:nvGrpSpPr>
+      <p:grpSpPr>
+        <a:xfrm>
+          <a:off x="0" y="0"/>
+          <a:ext cx="0" cy="0"/>
+          <a:chOff x="0" y="0"/>
+          <a:chExt cx="0" cy="0"/>
+        </a:xfrm>
+      </p:grpSpPr>
+      <p:sp>
+        <p:nvSpPr>
+          <p:cNvPr id="2" name="Diakép helye 1"/>
+          <p:cNvSpPr>
+            <a:spLocks noGrp="1" noRot="1" noChangeAspect="1"/>
+          </p:cNvSpPr>
+          <p:nvPr>
+            <p:ph type="sldImg"/>
+          </p:nvPr>
+        </p:nvSpPr>
+        <p:spPr/>
+      </p:sp>
+      <p:sp>
+        <p:nvSpPr>
+          <p:cNvPr id="3" name="Jegyzetek helye 2"/>
+          <p:cNvSpPr>
+            <a:spLocks noGrp="1"/>
+          </p:cNvSpPr>
+          <p:nvPr>
+            <p:ph type="body" idx="1"/>
+          </p:nvPr>
+        </p:nvSpPr>
+        <p:spPr/>
+        <p:txBody>
+          <a:bodyPr/>
+          <a:lstStyle/>
+          <a:p>
+            <a:r>
+              <a:rPr lang="hu-HU" dirty="0"/>
+              <a:t>A projekt fejlesztése csapatmunkában valósult meg, ahol a backend, adatbázis-kezelés és API-integrációk mellett a frontend és UI/UX tervezés is elkülönített feladatkörök szerint készült. A közös munkafolyamatot tervezés, </a:t>
+            </a:r>
+            <a:r>
+              <a:rPr lang="hu-HU" dirty="0" err="1"/>
+              <a:t>kódreview</a:t>
+            </a:r>
+            <a:r>
+              <a:rPr lang="hu-HU" dirty="0"/>
+              <a:t> és tesztelés támogatta agilis szemléletben, biztosítva a hatékony együttműködést. Az eredmény egy működő, reszponzív és felhasználóbarát alkalmazás lett, amely a </a:t>
+            </a:r>
+            <a:r>
+              <a:rPr lang="hu-HU" dirty="0" err="1"/>
+              <a:t>Magic</a:t>
+            </a:r>
+            <a:r>
+              <a:rPr lang="hu-HU" dirty="0"/>
+              <a:t> </a:t>
+            </a:r>
+            <a:r>
+              <a:rPr lang="hu-HU" dirty="0" err="1"/>
+              <a:t>Fridge</a:t>
+            </a:r>
+            <a:r>
+              <a:rPr lang="hu-HU" dirty="0"/>
+              <a:t> rendszer teljes funkcionalitását biztosítja.</a:t>
+            </a:r>
+          </a:p>
+        </p:txBody>
+      </p:sp>
+      <p:sp>
+        <p:nvSpPr>
+          <p:cNvPr id="4" name="Dia számának helye 3"/>
+          <p:cNvSpPr>
+            <a:spLocks noGrp="1"/>
+          </p:cNvSpPr>
+          <p:nvPr>
+            <p:ph type="sldNum" idx="3"/>
+          </p:nvPr>
+        </p:nvSpPr>
+        <p:spPr/>
+        <p:txBody>
+          <a:bodyPr/>
+          <a:lstStyle/>
+          <a:p>
+            <a:pPr indent="0" algn="r">
+              <a:buNone/>
+            </a:pPr>
+            <a:fld id="{05C0AE2C-FF9D-4E22-898F-5AC8655CDAB6}" type="slidenum">
+              <a:rPr lang="hu-HU" sz="1400" b="0" strike="noStrike" spc="-1" smtClean="0">
+                <a:solidFill>
+                  <a:srgbClr val="000000"/>
+                </a:solidFill>
+                <a:latin typeface="Times New Roman"/>
+              </a:rPr>
+              <a:t>14</a:t>
+            </a:fld>
+            <a:endParaRPr lang="hu-HU" sz="1400" b="0" strike="noStrike" spc="-1">
+              <a:solidFill>
+                <a:srgbClr val="000000"/>
+              </a:solidFill>
+              <a:latin typeface="Times New Roman"/>
+            </a:endParaRPr>
+          </a:p>
+        </p:txBody>
+      </p:sp>
+    </p:spTree>
+    <p:extLst>
+      <p:ext uri="{BB962C8B-B14F-4D97-AF65-F5344CB8AC3E}">
+        <p14:creationId xmlns:p14="http://schemas.microsoft.com/office/powerpoint/2010/main" val="1313680738"/>
+      </p:ext>
+    </p:extLst>
+  </p:cSld>
+  <p:clrMapOvr>
+    <a:masterClrMapping/>
+  </p:clrMapOvr>
+</p:notes>
+</file>
+
+<file path=ppt/notesSlides/notesSlide14.xml><?xml version="1.0" encoding="utf-8"?>
+<p:notes xmlns:a="http://schemas.openxmlformats.org/drawingml/2006/main" xmlns:r="http://schemas.openxmlformats.org/officeDocument/2006/relationships" xmlns:p="http://schemas.openxmlformats.org/presentationml/2006/main">
+  <p:cSld>
+    <p:spTree>
+      <p:nvGrpSpPr>
+        <p:cNvPr id="1" name=""/>
+        <p:cNvGrpSpPr/>
+        <p:nvPr/>
+      </p:nvGrpSpPr>
+      <p:grpSpPr>
+        <a:xfrm>
+          <a:off x="0" y="0"/>
+          <a:ext cx="0" cy="0"/>
+          <a:chOff x="0" y="0"/>
+          <a:chExt cx="0" cy="0"/>
+        </a:xfrm>
+      </p:grpSpPr>
+      <p:sp>
+        <p:nvSpPr>
           <p:cNvPr id="375" name="PlaceHolder 1"/>
           <p:cNvSpPr>
             <a:spLocks noGrp="1" noRot="1" noChangeAspect="1"/>
@@ -1035,14 +1498,145 @@
               </a:tabLst>
             </a:pPr>
             <a:r>
-              <a:rPr lang="hu-HU" sz="2000" b="0" strike="noStrike" spc="-1">
+              <a:rPr lang="hu-HU" sz="2000" b="0" strike="noStrike" spc="-1" dirty="0">
                 <a:solidFill>
                   <a:srgbClr val="000000"/>
                 </a:solidFill>
                 <a:latin typeface="Arial"/>
               </a:rPr>
-              <a:t>Összességében a Magic Fridge egy használható, valós problémára épülő megoldás. A legnagyobb előny a jobb átláthatóság, kevesebb pazarlás és egyszerűbb közös háztartási működés. Jövőben tovább bővíthető például okosabb ajánlásokkal vagy mobil fókuszú funkciókkal. Köszönjük a figyelmet.</a:t>
-            </a:r>
+              <a:t>Összességében a </a:t>
+            </a:r>
+            <a:r>
+              <a:rPr lang="hu-HU" sz="2000" b="0" strike="noStrike" spc="-1" dirty="0" err="1">
+                <a:solidFill>
+                  <a:srgbClr val="000000"/>
+                </a:solidFill>
+                <a:latin typeface="Arial"/>
+              </a:rPr>
+              <a:t>Magic</a:t>
+            </a:r>
+            <a:r>
+              <a:rPr lang="hu-HU" sz="2000" b="0" strike="noStrike" spc="-1" dirty="0">
+                <a:solidFill>
+                  <a:srgbClr val="000000"/>
+                </a:solidFill>
+                <a:latin typeface="Arial"/>
+              </a:rPr>
+              <a:t> </a:t>
+            </a:r>
+            <a:r>
+              <a:rPr lang="hu-HU" sz="2000" b="0" strike="noStrike" spc="-1" dirty="0" err="1">
+                <a:solidFill>
+                  <a:srgbClr val="000000"/>
+                </a:solidFill>
+                <a:latin typeface="Arial"/>
+              </a:rPr>
+              <a:t>Fridge</a:t>
+            </a:r>
+            <a:r>
+              <a:rPr lang="hu-HU" sz="2000" b="0" strike="noStrike" spc="-1" dirty="0">
+                <a:solidFill>
+                  <a:srgbClr val="000000"/>
+                </a:solidFill>
+                <a:latin typeface="Arial"/>
+              </a:rPr>
+              <a:t> egy használható, valós problémára épülő megoldás. A legnagyobb előny a jobb átláthatóság, kevesebb pazarlás és egyszerűbb közös háztartási működés. Jövőben tovább bővíthető például okosabb ajánlásokkal vagy mobil fókuszú </a:t>
+            </a:r>
+            <a:r>
+              <a:rPr lang="hu-HU" sz="2000" b="0" strike="noStrike" spc="-1" dirty="0" err="1">
+                <a:solidFill>
+                  <a:srgbClr val="000000"/>
+                </a:solidFill>
+                <a:latin typeface="Arial"/>
+              </a:rPr>
+              <a:t>funkciókkal.ű</a:t>
+            </a:r>
+            <a:endParaRPr lang="hu-HU" sz="2000" b="0" strike="noStrike" spc="-1" dirty="0">
+              <a:solidFill>
+                <a:srgbClr val="000000"/>
+              </a:solidFill>
+              <a:latin typeface="Arial"/>
+            </a:endParaRPr>
+          </a:p>
+          <a:p>
+            <a:pPr marL="216000" indent="0">
+              <a:lnSpc>
+                <a:spcPct val="100000"/>
+              </a:lnSpc>
+              <a:buNone/>
+              <a:tabLst>
+                <a:tab pos="0" algn="l"/>
+              </a:tabLst>
+            </a:pPr>
+            <a:endParaRPr lang="hu-HU" sz="2000" b="0" strike="noStrike" spc="-1">
+              <a:solidFill>
+                <a:srgbClr val="000000"/>
+              </a:solidFill>
+              <a:latin typeface="Arial"/>
+            </a:endParaRPr>
+          </a:p>
+          <a:p>
+            <a:pPr marL="216000" indent="0">
+              <a:lnSpc>
+                <a:spcPct val="100000"/>
+              </a:lnSpc>
+              <a:buNone/>
+              <a:tabLst>
+                <a:tab pos="0" algn="l"/>
+              </a:tabLst>
+            </a:pPr>
+            <a:endParaRPr lang="hu-HU" sz="2000" b="0" strike="noStrike" spc="-1" dirty="0">
+              <a:solidFill>
+                <a:srgbClr val="000000"/>
+              </a:solidFill>
+              <a:latin typeface="Arial"/>
+            </a:endParaRPr>
+          </a:p>
+          <a:p>
+            <a:pPr marL="216000" indent="0">
+              <a:lnSpc>
+                <a:spcPct val="100000"/>
+              </a:lnSpc>
+              <a:buNone/>
+              <a:tabLst>
+                <a:tab pos="0" algn="l"/>
+              </a:tabLst>
+            </a:pPr>
+            <a:r>
+              <a:rPr lang="hu-HU" sz="2000" b="0" strike="noStrike" spc="-1" dirty="0">
+                <a:solidFill>
+                  <a:srgbClr val="000000"/>
+                </a:solidFill>
+                <a:latin typeface="Arial"/>
+              </a:rPr>
+              <a:t> </a:t>
+            </a:r>
+            <a:r>
+              <a:rPr lang="hu-HU" sz="2000" dirty="0"/>
+              <a:t>A </a:t>
+            </a:r>
+            <a:r>
+              <a:rPr lang="hu-HU" sz="2000" dirty="0" err="1"/>
+              <a:t>Magic</a:t>
+            </a:r>
+            <a:r>
+              <a:rPr lang="hu-HU" sz="2000" dirty="0"/>
+              <a:t> </a:t>
+            </a:r>
+            <a:r>
+              <a:rPr lang="hu-HU" sz="2000" dirty="0" err="1"/>
+              <a:t>Fridge</a:t>
+            </a:r>
+            <a:r>
+              <a:rPr lang="hu-HU" sz="2000" dirty="0"/>
+              <a:t> projekt sikeresen megvalósította az alapvető funkciókat, többek között a hitelesítési rendszert, a háztartás- és raktárkezelést, valamint az automatikus bevásárlólista és recept API integrációját. A fejlesztés során kiemelt szempont volt a skálázhatóság és a felhasználói élmény, amely stabil alapot biztosít a jövőbeli bővítésekhez. A tervezett fejlesztések között szerepel mobilalkalmazás támogatás, AI-alapú ajánlórendszer, vonalkód-olvasó integráció, valamint részletes statisztikai és riport funkciók bevezetése.</a:t>
+            </a:r>
+            <a:endParaRPr lang="hu-HU" sz="2000" b="0" strike="noStrike" spc="-1" dirty="0">
+              <a:solidFill>
+                <a:srgbClr val="000000"/>
+              </a:solidFill>
+              <a:latin typeface="Arial"/>
+            </a:endParaRPr>
           </a:p>
         </p:txBody>
       </p:sp>
@@ -1207,13 +1801,49 @@
               </a:tabLst>
             </a:pPr>
             <a:r>
-              <a:rPr lang="hu-HU" sz="2000" b="0" strike="noStrike" spc="-1">
+              <a:rPr lang="hu-HU" sz="2000" b="0" strike="noStrike" spc="-1" dirty="0">
                 <a:solidFill>
                   <a:srgbClr val="000000"/>
                 </a:solidFill>
                 <a:latin typeface="Arial"/>
               </a:rPr>
-              <a:t>A kiinduló probléma az, hogy a legtöbb háztartásban nehéz fejben tartani, miből mennyi van otthon, mi fog hamarosan lejárni, és mit kell pótolni. Emiatt gyakori a dupla vásárlás és a kidobott élelmiszer. A Magic Fridge erre ad gyakorlati megoldást készletfigyeléssel, lejáratkövetéssel és receptalapú bevásárlási támogatással.</a:t>
+              <a:t>A kiinduló probléma az, hogy a legtöbb háztartásban nehéz fejben tartani, miből mennyi van otthon, mi fog hamarosan lejárni, és mit kell pótolni. Emiatt gyakori a dupla vásárlás és a kidobott élelmiszer. A </a:t>
+            </a:r>
+            <a:r>
+              <a:rPr lang="hu-HU" sz="2000" b="0" strike="noStrike" spc="-1" dirty="0" err="1">
+                <a:solidFill>
+                  <a:srgbClr val="000000"/>
+                </a:solidFill>
+                <a:latin typeface="Arial"/>
+              </a:rPr>
+              <a:t>Magic</a:t>
+            </a:r>
+            <a:r>
+              <a:rPr lang="hu-HU" sz="2000" b="0" strike="noStrike" spc="-1" dirty="0">
+                <a:solidFill>
+                  <a:srgbClr val="000000"/>
+                </a:solidFill>
+                <a:latin typeface="Arial"/>
+              </a:rPr>
+              <a:t> </a:t>
+            </a:r>
+            <a:r>
+              <a:rPr lang="hu-HU" sz="2000" b="0" strike="noStrike" spc="-1" dirty="0" err="1">
+                <a:solidFill>
+                  <a:srgbClr val="000000"/>
+                </a:solidFill>
+                <a:latin typeface="Arial"/>
+              </a:rPr>
+              <a:t>Fridge</a:t>
+            </a:r>
+            <a:r>
+              <a:rPr lang="hu-HU" sz="2000" b="0" strike="noStrike" spc="-1" dirty="0">
+                <a:solidFill>
+                  <a:srgbClr val="000000"/>
+                </a:solidFill>
+                <a:latin typeface="Arial"/>
+              </a:rPr>
+              <a:t> erre ad gyakorlati megoldást készletfigyeléssel, lejáratkövetéssel és receptalapú bevásárlási támogatással.</a:t>
             </a:r>
           </a:p>
         </p:txBody>
@@ -1379,13 +2009,13 @@
               </a:tabLst>
             </a:pPr>
             <a:r>
-              <a:rPr lang="hu-HU" sz="2000" b="0" strike="noStrike" spc="-1">
+              <a:rPr lang="hu-HU" sz="2000" b="0" strike="noStrike" spc="-1" dirty="0">
                 <a:solidFill>
                   <a:srgbClr val="000000"/>
                 </a:solidFill>
                 <a:latin typeface="Arial"/>
               </a:rPr>
-              <a:t>A rendszer több egymásra épülő modulból áll: belépés/regisztráció, háztartáskezelés, raktárkezelés, receptmodul, üzenetek és bevásárlólista. A lényeg, hogy ezek nem külön-külön működnek, hanem folyamatot alkotnak: készletből indulunk, receptet választunk, hiány esetén listát készítünk, majd vásárlás után frissítjük a készletet</a:t>
+              <a:t>A rendszer több egymásra épülő modulból áll: belépés/regisztráció, háztartáskezelés, raktárkezelés, receptmodul, üzenetek és bevásárlólista. A lényeg, hogy ezek nem külön-külön működnek, hanem folyamatot alkotnak: készletből indulunk, receptet választunk, hiány esetén listát készítünk, majd vásárlás után frissítjük a készletet.</a:t>
             </a:r>
           </a:p>
         </p:txBody>
@@ -1551,13 +2181,67 @@
               </a:tabLst>
             </a:pPr>
             <a:r>
-              <a:rPr lang="hu-HU" sz="2000" b="0" strike="noStrike" spc="-1">
+              <a:rPr lang="hu-HU" sz="2000" b="0" strike="noStrike" spc="-1" dirty="0">
                 <a:solidFill>
                   <a:srgbClr val="000000"/>
                 </a:solidFill>
                 <a:latin typeface="Arial"/>
               </a:rPr>
-              <a:t>A projekt backendje Laravel alapú PHP környezetben készült, a frontend oldalon Blade nézetek, JavaScript és Vite támogatja a megjelenítést és interakciót. Az adatokat relációs adatbázisban tároljuk. A backend üzleti logikát kezel, a frontend a felhasználói élményt, a külső API pedig receptadatokkal bővíti a rendszert.</a:t>
+              <a:t>A projekt backendje </a:t>
+            </a:r>
+            <a:r>
+              <a:rPr lang="hu-HU" sz="2000" b="0" strike="noStrike" spc="-1" dirty="0" err="1">
+                <a:solidFill>
+                  <a:srgbClr val="000000"/>
+                </a:solidFill>
+                <a:latin typeface="Arial"/>
+              </a:rPr>
+              <a:t>Laravel</a:t>
+            </a:r>
+            <a:r>
+              <a:rPr lang="hu-HU" sz="2000" b="0" strike="noStrike" spc="-1" dirty="0">
+                <a:solidFill>
+                  <a:srgbClr val="000000"/>
+                </a:solidFill>
+                <a:latin typeface="Arial"/>
+              </a:rPr>
+              <a:t> alapú PHP környezetben készült, a frontend oldalon </a:t>
+            </a:r>
+            <a:r>
+              <a:rPr lang="hu-HU" sz="2000" b="0" strike="noStrike" spc="-1" dirty="0" err="1">
+                <a:solidFill>
+                  <a:srgbClr val="000000"/>
+                </a:solidFill>
+                <a:latin typeface="Arial"/>
+              </a:rPr>
+              <a:t>Blade</a:t>
+            </a:r>
+            <a:r>
+              <a:rPr lang="hu-HU" sz="2000" b="0" strike="noStrike" spc="-1" dirty="0">
+                <a:solidFill>
+                  <a:srgbClr val="000000"/>
+                </a:solidFill>
+                <a:latin typeface="Arial"/>
+              </a:rPr>
+              <a:t> nézetek, JavaScript és </a:t>
+            </a:r>
+            <a:r>
+              <a:rPr lang="hu-HU" sz="2000" b="0" strike="noStrike" spc="-1" dirty="0" err="1">
+                <a:solidFill>
+                  <a:srgbClr val="000000"/>
+                </a:solidFill>
+                <a:latin typeface="Arial"/>
+              </a:rPr>
+              <a:t>Vite</a:t>
+            </a:r>
+            <a:r>
+              <a:rPr lang="hu-HU" sz="2000" b="0" strike="noStrike" spc="-1" dirty="0">
+                <a:solidFill>
+                  <a:srgbClr val="000000"/>
+                </a:solidFill>
+                <a:latin typeface="Arial"/>
+              </a:rPr>
+              <a:t> támogatja a megjelenítést és interakciót. Az adatokat relációs adatbázisban tároljuk. A backend üzleti logikát kezel, a frontend a felhasználói élményt, a külső API pedig receptadatokkal bővíti a rendszert.</a:t>
             </a:r>
           </a:p>
         </p:txBody>
@@ -1723,13 +2407,31 @@
               </a:tabLst>
             </a:pPr>
             <a:r>
-              <a:rPr lang="hu-HU" sz="2000" b="0" strike="noStrike" spc="-1">
+              <a:rPr lang="hu-HU" sz="2000" b="0" strike="noStrike" spc="-1" dirty="0">
                 <a:solidFill>
                   <a:srgbClr val="000000"/>
                 </a:solidFill>
                 <a:latin typeface="Arial"/>
               </a:rPr>
-              <a:t>Az adatbázis külön táblákban kezeli a felhasználókat, háztartásokat, készletelemeket, recepteket, üzeneteket és bevásárlólista-elemeket. Rövid demo során jól látható a teljes körfolyamat: belépés, készletfeltöltés, receptellenőrzés, hiánylistázás, bevásárlólista és készletfrissítés.</a:t>
+              <a:t>Az adatbázis külön táblákban kezeli a felhasználókat, háztartásokat, készletelemeket, recepteket, üzeneteket és bevásárlólista-elemeket. Rövid </a:t>
+            </a:r>
+            <a:r>
+              <a:rPr lang="hu-HU" sz="2000" b="0" strike="noStrike" spc="-1" dirty="0" err="1">
+                <a:solidFill>
+                  <a:srgbClr val="000000"/>
+                </a:solidFill>
+                <a:latin typeface="Arial"/>
+              </a:rPr>
+              <a:t>demo</a:t>
+            </a:r>
+            <a:r>
+              <a:rPr lang="hu-HU" sz="2000" b="0" strike="noStrike" spc="-1" dirty="0">
+                <a:solidFill>
+                  <a:srgbClr val="000000"/>
+                </a:solidFill>
+                <a:latin typeface="Arial"/>
+              </a:rPr>
+              <a:t> során jól látható a teljes körfolyamat: belépés, készletfeltöltés, receptellenőrzés, hiánylistázás, bevásárlólista és készletfrissítés.</a:t>
             </a:r>
           </a:p>
         </p:txBody>
@@ -1835,7 +2537,7 @@
       </p:grpSpPr>
       <p:sp>
         <p:nvSpPr>
-          <p:cNvPr id="360" name="PlaceHolder 1"/>
+          <p:cNvPr id="2" name="Diakép helye 1"/>
           <p:cNvSpPr>
             <a:spLocks noGrp="1" noRot="1" noChangeAspect="1"/>
           </p:cNvSpPr>
@@ -1845,133 +2547,101 @@
         </p:nvSpPr>
         <p:spPr>
           <a:xfrm>
-            <a:off x="0" y="0"/>
+            <a:off x="0" y="812800"/>
             <a:ext cx="0" cy="0"/>
           </a:xfrm>
-          <a:prstGeom prst="rect">
-            <a:avLst/>
-          </a:prstGeom>
-          <a:ln w="0">
-            <a:noFill/>
-          </a:ln>
-        </p:spPr>
-      </p:sp>
-      <p:sp>
-        <p:nvSpPr>
-          <p:cNvPr id="361" name="PlaceHolder 2"/>
+        </p:spPr>
+      </p:sp>
+      <p:sp>
+        <p:nvSpPr>
+          <p:cNvPr id="3" name="Jegyzetek helye 2"/>
           <p:cNvSpPr>
             <a:spLocks noGrp="1"/>
           </p:cNvSpPr>
           <p:nvPr>
-            <p:ph type="body"/>
+            <p:ph type="body" idx="1"/>
           </p:nvPr>
         </p:nvSpPr>
-        <p:spPr>
-          <a:xfrm>
-            <a:off x="0" y="0"/>
-            <a:ext cx="0" cy="0"/>
-          </a:xfrm>
-          <a:prstGeom prst="rect">
-            <a:avLst/>
-          </a:prstGeom>
-          <a:noFill/>
-          <a:ln w="0">
-            <a:noFill/>
-          </a:ln>
-        </p:spPr>
-        <p:txBody>
-          <a:bodyPr lIns="90000" tIns="-45000" rIns="90000" bIns="-45000" anchor="t">
-            <a:noAutofit/>
-          </a:bodyPr>
-          <a:lstStyle/>
-          <a:p>
-            <a:pPr marL="216000" indent="0">
-              <a:lnSpc>
-                <a:spcPct val="100000"/>
-              </a:lnSpc>
-              <a:buNone/>
-              <a:tabLst>
-                <a:tab pos="0" algn="l"/>
-              </a:tabLst>
-            </a:pPr>
-            <a:r>
-              <a:rPr lang="hu-HU" sz="2000" b="0" strike="noStrike" spc="-1">
-                <a:solidFill>
-                  <a:srgbClr val="000000"/>
-                </a:solidFill>
-                <a:latin typeface="Arial"/>
-              </a:rPr>
-              <a:t>A rendszer figyelmeztet a lejárathoz közeli termékekre, így időben lehet reagálni. A belépéshez kötött funkciók védik az adatokat, és biztosítják, hogy csak jogosult felhasználók érjék el a háztartási információkat. Az üzenet/invite logika pedig támogatja a közös működést és a meghívások kezelését.</a:t>
-            </a:r>
-          </a:p>
-        </p:txBody>
-      </p:sp>
-      <p:sp>
-        <p:nvSpPr>
-          <p:cNvPr id="362" name="PlaceHolder 3"/>
+        <p:spPr/>
+        <p:txBody>
+          <a:bodyPr/>
+          <a:lstStyle/>
+          <a:p>
+            <a:r>
+              <a:rPr lang="hu-HU" dirty="0"/>
+              <a:t>Backend technológiánk 4 főbb részből épül fel-&gt; Keretrendszer, </a:t>
+            </a:r>
+            <a:r>
+              <a:rPr lang="hu-HU" dirty="0" err="1"/>
+              <a:t>Routing</a:t>
+            </a:r>
+            <a:r>
+              <a:rPr lang="hu-HU" dirty="0"/>
+              <a:t>, Vezérlők illetve az </a:t>
+            </a:r>
+            <a:r>
+              <a:rPr lang="hu-HU" dirty="0" err="1"/>
+              <a:t>emailes</a:t>
+            </a:r>
+            <a:r>
+              <a:rPr lang="hu-HU" dirty="0"/>
+              <a:t> visszajelzés. Amint a képen is látható , a Keretrendszerhez </a:t>
+            </a:r>
+            <a:r>
+              <a:rPr lang="hu-HU" dirty="0" err="1"/>
+              <a:t>Laravelt</a:t>
+            </a:r>
+            <a:r>
+              <a:rPr lang="hu-HU" dirty="0"/>
+              <a:t> használtunk PHP-</a:t>
+            </a:r>
+            <a:r>
+              <a:rPr lang="hu-HU" dirty="0" err="1"/>
+              <a:t>val</a:t>
+            </a:r>
+            <a:r>
+              <a:rPr lang="hu-HU" dirty="0"/>
+              <a:t> , </a:t>
+            </a:r>
+            <a:r>
+              <a:rPr lang="hu-HU" dirty="0" err="1"/>
+              <a:t>Routhing</a:t>
+            </a:r>
+            <a:r>
+              <a:rPr lang="hu-HU" dirty="0"/>
+              <a:t>.</a:t>
+            </a:r>
+          </a:p>
+        </p:txBody>
+      </p:sp>
+      <p:sp>
+        <p:nvSpPr>
+          <p:cNvPr id="4" name="Dia számának helye 3"/>
           <p:cNvSpPr>
             <a:spLocks noGrp="1"/>
           </p:cNvSpPr>
           <p:nvPr>
-            <p:ph type="sldNum" idx="9"/>
+            <p:ph type="sldNum" idx="3"/>
           </p:nvPr>
         </p:nvSpPr>
-        <p:spPr>
-          <a:xfrm>
-            <a:off x="0" y="0"/>
-            <a:ext cx="0" cy="0"/>
-          </a:xfrm>
-          <a:prstGeom prst="rect">
-            <a:avLst/>
-          </a:prstGeom>
-          <a:noFill/>
-          <a:ln w="0">
-            <a:noFill/>
-          </a:ln>
-        </p:spPr>
-        <p:txBody>
-          <a:bodyPr lIns="90000" tIns="-45000" rIns="90000" bIns="-45000" anchor="t">
-            <a:noAutofit/>
-          </a:bodyPr>
-          <a:lstStyle>
-            <a:lvl1pPr indent="0" algn="r" defTabSz="914400">
-              <a:lnSpc>
-                <a:spcPct val="100000"/>
-              </a:lnSpc>
+        <p:spPr/>
+        <p:txBody>
+          <a:bodyPr/>
+          <a:lstStyle/>
+          <a:p>
+            <a:pPr indent="0" algn="r">
               <a:buNone/>
-              <a:tabLst>
-                <a:tab pos="0" algn="l"/>
-              </a:tabLst>
-              <a:defRPr lang="en-US" sz="1800" b="0" strike="noStrike" spc="-1">
-                <a:solidFill>
-                  <a:schemeClr val="dk1"/>
-                </a:solidFill>
-                <a:latin typeface="+mn-lt"/>
-                <a:ea typeface="+mn-ea"/>
-              </a:defRPr>
-            </a:lvl1pPr>
-          </a:lstStyle>
-          <a:p>
-            <a:pPr indent="0" algn="r" defTabSz="914400">
-              <a:lnSpc>
-                <a:spcPct val="100000"/>
-              </a:lnSpc>
-              <a:buNone/>
-              <a:tabLst>
-                <a:tab pos="0" algn="l"/>
-              </a:tabLst>
-            </a:pPr>
-            <a:fld id="{C2A9E565-09C2-448D-8FCD-138A0E05B725}" type="slidenum">
-              <a:rPr lang="en-US" sz="1800" b="0" strike="noStrike" spc="-1">
-                <a:solidFill>
-                  <a:schemeClr val="dk1"/>
-                </a:solidFill>
-                <a:latin typeface="+mn-lt"/>
-                <a:ea typeface="+mn-ea"/>
-              </a:rPr>
-              <a:t>9</a:t>
+            </a:pPr>
+            <a:fld id="{05C0AE2C-FF9D-4E22-898F-5AC8655CDAB6}" type="slidenum">
+              <a:rPr lang="hu-HU" sz="1400" b="0" strike="noStrike" spc="-1" smtClean="0">
+                <a:solidFill>
+                  <a:srgbClr val="000000"/>
+                </a:solidFill>
+                <a:latin typeface="Times New Roman"/>
+              </a:rPr>
+              <a:t>6</a:t>
             </a:fld>
-            <a:endParaRPr lang="hu-HU" sz="1800" b="0" strike="noStrike" spc="-1">
+            <a:endParaRPr lang="hu-HU" sz="1400" b="0" strike="noStrike" spc="-1">
               <a:solidFill>
                 <a:srgbClr val="000000"/>
               </a:solidFill>
@@ -1981,6 +2651,11 @@
         </p:txBody>
       </p:sp>
     </p:spTree>
+    <p:extLst>
+      <p:ext uri="{BB962C8B-B14F-4D97-AF65-F5344CB8AC3E}">
+        <p14:creationId xmlns:p14="http://schemas.microsoft.com/office/powerpoint/2010/main" val="2543843300"/>
+      </p:ext>
+    </p:extLst>
   </p:cSld>
   <p:clrMapOvr>
     <a:masterClrMapping/>
@@ -2007,7 +2682,7 @@
       </p:grpSpPr>
       <p:sp>
         <p:nvSpPr>
-          <p:cNvPr id="363" name="PlaceHolder 1"/>
+          <p:cNvPr id="2" name="Diakép helye 1"/>
           <p:cNvSpPr>
             <a:spLocks noGrp="1" noRot="1" noChangeAspect="1"/>
           </p:cNvSpPr>
@@ -2015,135 +2690,81 @@
             <p:ph type="sldImg"/>
           </p:nvPr>
         </p:nvSpPr>
-        <p:spPr>
-          <a:xfrm>
-            <a:off x="0" y="0"/>
-            <a:ext cx="0" cy="0"/>
-          </a:xfrm>
-          <a:prstGeom prst="rect">
-            <a:avLst/>
-          </a:prstGeom>
-          <a:ln w="0">
-            <a:noFill/>
-          </a:ln>
-        </p:spPr>
-      </p:sp>
-      <p:sp>
-        <p:nvSpPr>
-          <p:cNvPr id="364" name="PlaceHolder 2"/>
+        <p:spPr/>
+      </p:sp>
+      <p:sp>
+        <p:nvSpPr>
+          <p:cNvPr id="3" name="Jegyzetek helye 2"/>
           <p:cNvSpPr>
             <a:spLocks noGrp="1"/>
           </p:cNvSpPr>
           <p:nvPr>
-            <p:ph type="body"/>
+            <p:ph type="body" idx="1"/>
           </p:nvPr>
         </p:nvSpPr>
-        <p:spPr>
-          <a:xfrm>
-            <a:off x="0" y="0"/>
-            <a:ext cx="0" cy="0"/>
-          </a:xfrm>
-          <a:prstGeom prst="rect">
-            <a:avLst/>
-          </a:prstGeom>
-          <a:noFill/>
-          <a:ln w="0">
-            <a:noFill/>
-          </a:ln>
-        </p:spPr>
-        <p:txBody>
-          <a:bodyPr lIns="90000" tIns="-45000" rIns="90000" bIns="-45000" anchor="t">
-            <a:noAutofit/>
-          </a:bodyPr>
-          <a:lstStyle/>
-          <a:p>
-            <a:pPr marL="216000" indent="0">
-              <a:lnSpc>
-                <a:spcPct val="100000"/>
-              </a:lnSpc>
-              <a:buNone/>
-              <a:tabLst>
-                <a:tab pos="0" algn="l"/>
-              </a:tabLst>
-            </a:pPr>
-            <a:r>
-              <a:rPr lang="hu-HU" sz="2000" b="0" strike="noStrike" spc="-1">
-                <a:solidFill>
-                  <a:srgbClr val="000000"/>
-                </a:solidFill>
-                <a:latin typeface="Arial"/>
-              </a:rPr>
-              <a:t>A háztartás funkció lehetővé teszi, hogy több felhasználó ugyanazon készlettel dolgozzon. Ez különösen hasznos családoknál vagy közös albérletben, mert mindenki ugyanazt a valós készletállapotot látja. Így átláthatóbbá válik, mi van a hűtőben és kamrában, és csökken a kommunikációs félreértés.</a:t>
-            </a:r>
-          </a:p>
-        </p:txBody>
-      </p:sp>
-      <p:sp>
-        <p:nvSpPr>
-          <p:cNvPr id="365" name="PlaceHolder 3"/>
+        <p:spPr/>
+        <p:txBody>
+          <a:bodyPr/>
+          <a:lstStyle/>
+          <a:p>
+            <a:r>
+              <a:rPr lang="hu-HU" dirty="0"/>
+              <a:t>A felület reszponzív kialakítása külön optimalizált nézeteket biztosít asztali, tablet és mobil eszközökre, figyelembe véve a különböző </a:t>
+            </a:r>
+            <a:r>
+              <a:rPr lang="hu-HU" dirty="0" err="1"/>
+              <a:t>kijelzőméreteket</a:t>
+            </a:r>
+            <a:r>
+              <a:rPr lang="hu-HU" dirty="0"/>
+              <a:t> és felhasználói interakciókat. Az asztali verzió 3 oszlopos rácsszerkezetet és teljes navigációt alkalmaz, míg kisebb képernyőkön kompakt menü és egyoszlopos elrendezés javítja a használhatóságot. A rendszer nyomtatási nézetet is támogat, amely tiszta, strukturált és nyomtatható tartalommegjelenítést biztosít </a:t>
+            </a:r>
+            <a:r>
+              <a:rPr lang="hu-HU" sz="1200" kern="1200" dirty="0">
+                <a:solidFill>
+                  <a:schemeClr val="tx1"/>
+                </a:solidFill>
+                <a:latin typeface="+mn-lt"/>
+                <a:ea typeface="+mn-ea"/>
+                <a:cs typeface="+mn-cs"/>
+              </a:rPr>
+              <a:t>@media print</a:t>
+            </a:r>
+            <a:r>
+              <a:rPr lang="hu-HU" dirty="0"/>
+              <a:t> használatával.</a:t>
+            </a:r>
+          </a:p>
+        </p:txBody>
+      </p:sp>
+      <p:sp>
+        <p:nvSpPr>
+          <p:cNvPr id="4" name="Dia számának helye 3"/>
           <p:cNvSpPr>
             <a:spLocks noGrp="1"/>
           </p:cNvSpPr>
           <p:nvPr>
-            <p:ph type="sldNum" idx="10"/>
+            <p:ph type="sldNum" idx="3"/>
           </p:nvPr>
         </p:nvSpPr>
-        <p:spPr>
-          <a:xfrm>
-            <a:off x="0" y="0"/>
-            <a:ext cx="0" cy="0"/>
-          </a:xfrm>
-          <a:prstGeom prst="rect">
-            <a:avLst/>
-          </a:prstGeom>
-          <a:noFill/>
-          <a:ln w="0">
-            <a:noFill/>
-          </a:ln>
-        </p:spPr>
-        <p:txBody>
-          <a:bodyPr lIns="90000" tIns="-45000" rIns="90000" bIns="-45000" anchor="t">
-            <a:noAutofit/>
-          </a:bodyPr>
-          <a:lstStyle>
-            <a:lvl1pPr indent="0" algn="r" defTabSz="914400">
-              <a:lnSpc>
-                <a:spcPct val="100000"/>
-              </a:lnSpc>
+        <p:spPr/>
+        <p:txBody>
+          <a:bodyPr/>
+          <a:lstStyle/>
+          <a:p>
+            <a:pPr indent="0" algn="r">
               <a:buNone/>
-              <a:tabLst>
-                <a:tab pos="0" algn="l"/>
-              </a:tabLst>
-              <a:defRPr lang="en-US" sz="1800" b="0" strike="noStrike" spc="-1">
-                <a:solidFill>
-                  <a:schemeClr val="dk1"/>
-                </a:solidFill>
-                <a:latin typeface="+mn-lt"/>
-                <a:ea typeface="+mn-ea"/>
-              </a:defRPr>
-            </a:lvl1pPr>
-          </a:lstStyle>
-          <a:p>
-            <a:pPr indent="0" algn="r" defTabSz="914400">
-              <a:lnSpc>
-                <a:spcPct val="100000"/>
-              </a:lnSpc>
-              <a:buNone/>
-              <a:tabLst>
-                <a:tab pos="0" algn="l"/>
-              </a:tabLst>
-            </a:pPr>
-            <a:fld id="{CA027473-FF45-49F9-B72D-6F75367B8441}" type="slidenum">
-              <a:rPr lang="en-US" sz="1800" b="0" strike="noStrike" spc="-1">
-                <a:solidFill>
-                  <a:schemeClr val="dk1"/>
-                </a:solidFill>
-                <a:latin typeface="+mn-lt"/>
-                <a:ea typeface="+mn-ea"/>
-              </a:rPr>
-              <a:t>10</a:t>
+            </a:pPr>
+            <a:fld id="{05C0AE2C-FF9D-4E22-898F-5AC8655CDAB6}" type="slidenum">
+              <a:rPr lang="hu-HU" sz="1400" b="0" strike="noStrike" spc="-1" smtClean="0">
+                <a:solidFill>
+                  <a:srgbClr val="000000"/>
+                </a:solidFill>
+                <a:latin typeface="Times New Roman"/>
+              </a:rPr>
+              <a:t>8</a:t>
             </a:fld>
-            <a:endParaRPr lang="hu-HU" sz="1800" b="0" strike="noStrike" spc="-1">
+            <a:endParaRPr lang="hu-HU" sz="1400" b="0" strike="noStrike" spc="-1">
               <a:solidFill>
                 <a:srgbClr val="000000"/>
               </a:solidFill>
@@ -2153,6 +2774,11 @@
         </p:txBody>
       </p:sp>
     </p:spTree>
+    <p:extLst>
+      <p:ext uri="{BB962C8B-B14F-4D97-AF65-F5344CB8AC3E}">
+        <p14:creationId xmlns:p14="http://schemas.microsoft.com/office/powerpoint/2010/main" val="2877161799"/>
+      </p:ext>
+    </p:extLst>
   </p:cSld>
   <p:clrMapOvr>
     <a:masterClrMapping/>
@@ -2179,7 +2805,7 @@
       </p:grpSpPr>
       <p:sp>
         <p:nvSpPr>
-          <p:cNvPr id="366" name="PlaceHolder 1"/>
+          <p:cNvPr id="360" name="PlaceHolder 1"/>
           <p:cNvSpPr>
             <a:spLocks noGrp="1" noRot="1" noChangeAspect="1"/>
           </p:cNvSpPr>
@@ -2202,7 +2828,7 @@
       </p:sp>
       <p:sp>
         <p:nvSpPr>
-          <p:cNvPr id="367" name="PlaceHolder 2"/>
+          <p:cNvPr id="361" name="PlaceHolder 2"/>
           <p:cNvSpPr>
             <a:spLocks noGrp="1"/>
           </p:cNvSpPr>
@@ -2229,26 +2855,108 @@
           </a:bodyPr>
           <a:lstStyle/>
           <a:p>
-            <a:pPr marL="216000" indent="-216000">
+            <a:pPr marL="216000" indent="0">
+              <a:lnSpc>
+                <a:spcPct val="100000"/>
+              </a:lnSpc>
               <a:buNone/>
-            </a:pPr>
-            <a:endParaRPr lang="hu-HU" sz="1800" b="0" strike="noStrike" spc="-1">
+              <a:tabLst>
+                <a:tab pos="0" algn="l"/>
+              </a:tabLst>
+            </a:pPr>
+            <a:r>
+              <a:rPr lang="hu-HU" sz="2000" b="0" strike="noStrike" spc="-1" dirty="0">
+                <a:solidFill>
+                  <a:srgbClr val="000000"/>
+                </a:solidFill>
+                <a:latin typeface="Arial"/>
+              </a:rPr>
+              <a:t>A rendszer figyelmeztet a lejárathoz közeli termékekre, így időben lehet reagálni. A belépéshez kötött funkciók védik az adatokat, és biztosítják, hogy csak jogosult felhasználók érjék el a háztartási információkat. Az üzenet/</a:t>
+            </a:r>
+            <a:r>
+              <a:rPr lang="hu-HU" sz="2000" b="0" strike="noStrike" spc="-1" dirty="0" err="1">
+                <a:solidFill>
+                  <a:srgbClr val="000000"/>
+                </a:solidFill>
+                <a:latin typeface="Arial"/>
+              </a:rPr>
+              <a:t>invite</a:t>
+            </a:r>
+            <a:r>
+              <a:rPr lang="hu-HU" sz="2000" b="0" strike="noStrike" spc="-1" dirty="0">
+                <a:solidFill>
+                  <a:srgbClr val="000000"/>
+                </a:solidFill>
+                <a:latin typeface="Arial"/>
+              </a:rPr>
+              <a:t> logika pedig támogatja a közös működést és a meghívások kezelését.</a:t>
+            </a:r>
+          </a:p>
+          <a:p>
+            <a:pPr marL="216000" indent="0">
+              <a:lnSpc>
+                <a:spcPct val="100000"/>
+              </a:lnSpc>
+              <a:buNone/>
+              <a:tabLst>
+                <a:tab pos="0" algn="l"/>
+              </a:tabLst>
+            </a:pPr>
+            <a:endParaRPr lang="hu-HU" sz="2000" b="0" strike="noStrike" spc="-1" dirty="0">
               <a:solidFill>
                 <a:srgbClr val="000000"/>
               </a:solidFill>
               <a:latin typeface="Arial"/>
             </a:endParaRPr>
           </a:p>
-        </p:txBody>
-      </p:sp>
-      <p:sp>
-        <p:nvSpPr>
-          <p:cNvPr id="368" name="PlaceHolder 3"/>
+          <a:p>
+            <a:pPr marL="216000" indent="0">
+              <a:lnSpc>
+                <a:spcPct val="100000"/>
+              </a:lnSpc>
+              <a:buNone/>
+              <a:tabLst>
+                <a:tab pos="0" algn="l"/>
+              </a:tabLst>
+            </a:pPr>
+            <a:endParaRPr lang="hu-HU" sz="2000" b="0" strike="noStrike" spc="-1" dirty="0">
+              <a:solidFill>
+                <a:srgbClr val="000000"/>
+              </a:solidFill>
+              <a:latin typeface="Arial"/>
+            </a:endParaRPr>
+          </a:p>
+          <a:p>
+            <a:pPr marL="216000" indent="0">
+              <a:lnSpc>
+                <a:spcPct val="100000"/>
+              </a:lnSpc>
+              <a:buNone/>
+              <a:tabLst>
+                <a:tab pos="0" algn="l"/>
+              </a:tabLst>
+            </a:pPr>
+            <a:r>
+              <a:rPr lang="hu-HU" sz="2000" dirty="0"/>
+              <a:t>Az üzenetkezelő modul központi kommunikációs felületet biztosít a háztartás tagjai számára, támogatva a meghívások kezelését, automatikus értesítéseket és az üzenetek státuszkövetését. A rendszer különböző üzenettípusokat alkalmaz színalapú jelöléssel, ezáltal átláthatóbbá és gyorsabban értelmezhetővé válik az információáramlás. A kialakítás célja a hatékony koordináció és a valós idejű együttműködés támogatása egy egységes, felhasználóbarát felületen.</a:t>
+            </a:r>
+            <a:endParaRPr lang="hu-HU" sz="2000" b="0" strike="noStrike" spc="-1" dirty="0">
+              <a:solidFill>
+                <a:srgbClr val="000000"/>
+              </a:solidFill>
+              <a:latin typeface="Arial"/>
+            </a:endParaRPr>
+          </a:p>
+        </p:txBody>
+      </p:sp>
+      <p:sp>
+        <p:nvSpPr>
+          <p:cNvPr id="362" name="PlaceHolder 3"/>
           <p:cNvSpPr>
             <a:spLocks noGrp="1"/>
           </p:cNvSpPr>
           <p:nvPr>
-            <p:ph type="sldNum" idx="11"/>
+            <p:ph type="sldNum" idx="9"/>
           </p:nvPr>
         </p:nvSpPr>
         <p:spPr>
@@ -2296,7 +3004,7 @@
                 <a:tab pos="0" algn="l"/>
               </a:tabLst>
             </a:pPr>
-            <a:fld id="{437B96C4-8782-4684-9367-2BFEB3021B85}" type="slidenum">
+            <a:fld id="{C2A9E565-09C2-448D-8FCD-138A0E05B725}" type="slidenum">
               <a:rPr lang="en-US" sz="1800" b="0" strike="noStrike" spc="-1">
                 <a:solidFill>
                   <a:schemeClr val="dk1"/>
@@ -2304,7 +3012,7 @@
                 <a:latin typeface="+mn-lt"/>
                 <a:ea typeface="+mn-ea"/>
               </a:rPr>
-              <a:t>11</a:t>
+              <a:t>9</a:t>
             </a:fld>
             <a:endParaRPr lang="hu-HU" sz="1800" b="0" strike="noStrike" spc="-1">
               <a:solidFill>
@@ -2342,7 +3050,7 @@
       </p:grpSpPr>
       <p:sp>
         <p:nvSpPr>
-          <p:cNvPr id="369" name="PlaceHolder 1"/>
+          <p:cNvPr id="363" name="PlaceHolder 1"/>
           <p:cNvSpPr>
             <a:spLocks noGrp="1" noRot="1" noChangeAspect="1"/>
           </p:cNvSpPr>
@@ -2365,7 +3073,7 @@
       </p:sp>
       <p:sp>
         <p:nvSpPr>
-          <p:cNvPr id="370" name="PlaceHolder 2"/>
+          <p:cNvPr id="364" name="PlaceHolder 2"/>
           <p:cNvSpPr>
             <a:spLocks noGrp="1"/>
           </p:cNvSpPr>
@@ -2402,25 +3110,25 @@
               </a:tabLst>
             </a:pPr>
             <a:r>
-              <a:rPr lang="hu-HU" sz="2000" b="0" strike="noStrike" spc="-1">
+              <a:rPr lang="hu-HU" sz="2000" b="0" strike="noStrike" spc="-1" dirty="0">
                 <a:solidFill>
                   <a:srgbClr val="000000"/>
                 </a:solidFill>
                 <a:latin typeface="Arial"/>
               </a:rPr>
-              <a:t>A receptmodulban saját receptek és külső API-ból érkező receptek is kezelhetők. A rendszer a recept hozzávalóit összeveti az aktuális készlettel, és megmutatja, mi hiányzik. Ez főzés előtt pontos képet ad, és segít abban, hogy célzottan vásároljunk, ne "biztonságból" mindent pluszban.</a:t>
-            </a:r>
-          </a:p>
-        </p:txBody>
-      </p:sp>
-      <p:sp>
-        <p:nvSpPr>
-          <p:cNvPr id="371" name="PlaceHolder 3"/>
+              <a:t>A háztartás funkció lehetővé teszi, hogy több felhasználó ugyanazon készlettel dolgozzon. Ez különösen hasznos családoknál vagy közös albérletben, mert mindenki ugyanazt a valós készletállapotot látja. Így átláthatóbbá válik, mi van a hűtőben és kamrában, és csökken a kommunikációs félreértés.</a:t>
+            </a:r>
+          </a:p>
+        </p:txBody>
+      </p:sp>
+      <p:sp>
+        <p:nvSpPr>
+          <p:cNvPr id="365" name="PlaceHolder 3"/>
           <p:cNvSpPr>
             <a:spLocks noGrp="1"/>
           </p:cNvSpPr>
           <p:nvPr>
-            <p:ph type="sldNum" idx="12"/>
+            <p:ph type="sldNum" idx="10"/>
           </p:nvPr>
         </p:nvSpPr>
         <p:spPr>
@@ -2468,7 +3176,7 @@
                 <a:tab pos="0" algn="l"/>
               </a:tabLst>
             </a:pPr>
-            <a:fld id="{68D65B0F-0079-4DE9-9BF0-0C9AB3F17167}" type="slidenum">
+            <a:fld id="{CA027473-FF45-49F9-B72D-6F75367B8441}" type="slidenum">
               <a:rPr lang="en-US" sz="1800" b="0" strike="noStrike" spc="-1">
                 <a:solidFill>
                   <a:schemeClr val="dk1"/>
@@ -2476,7 +3184,7 @@
                 <a:latin typeface="+mn-lt"/>
                 <a:ea typeface="+mn-ea"/>
               </a:rPr>
-              <a:t>12</a:t>
+              <a:t>10</a:t>
             </a:fld>
             <a:endParaRPr lang="hu-HU" sz="1800" b="0" strike="noStrike" spc="-1">
               <a:solidFill>
@@ -19481,7 +20189,7 @@
               </a:tabLst>
             </a:pPr>
             <a:r>
-              <a:rPr lang="en-US" sz="1850" b="0" strike="noStrike" spc="-1">
+              <a:rPr lang="en-US" sz="1850" b="0" strike="noStrike" spc="-1" dirty="0">
                 <a:solidFill>
                   <a:srgbClr val="D9E1FF"/>
                 </a:solidFill>
@@ -19494,7 +20202,7 @@
               <a:t>frontend</a:t>
             </a:r>
             <a:r>
-              <a:rPr lang="en-US" sz="1850" b="0" strike="noStrike" spc="-1">
+              <a:rPr lang="en-US" sz="1850" b="0" strike="noStrike" spc="-1" dirty="0">
                 <a:solidFill>
                   <a:srgbClr val="D9E1FF"/>
                 </a:solidFill>
@@ -19504,7 +20212,7 @@
               <a:t>, </a:t>
             </a:r>
             <a:r>
-              <a:rPr lang="en-US" sz="1850" b="0" strike="noStrike" spc="-1">
+              <a:rPr lang="en-US" sz="1850" b="0" strike="noStrike" spc="-1" dirty="0">
                 <a:solidFill>
                   <a:srgbClr val="D9E1FF"/>
                 </a:solidFill>
@@ -19514,9 +20222,22 @@
                 <a:latin typeface="Calibri Light"/>
                 <a:ea typeface="Consolas"/>
               </a:rPr>
-              <a:t>UI/UX, reszponzív</a:t>
-            </a:r>
-            <a:endParaRPr lang="hu-HU" sz="1850" b="0" strike="noStrike" spc="-1">
+              <a:t>UI/UX, </a:t>
+            </a:r>
+            <a:r>
+              <a:rPr lang="en-US" sz="1850" b="0" strike="noStrike" spc="-1" dirty="0" err="1">
+                <a:solidFill>
+                  <a:srgbClr val="D9E1FF"/>
+                </a:solidFill>
+                <a:highlight>
+                  <a:srgbClr val="191740"/>
+                </a:highlight>
+                <a:latin typeface="Calibri Light"/>
+                <a:ea typeface="Consolas"/>
+              </a:rPr>
+              <a:t>reszponzív</a:t>
+            </a:r>
+            <a:endParaRPr lang="hu-HU" sz="1850" b="0" strike="noStrike" spc="-1" dirty="0">
               <a:solidFill>
                 <a:srgbClr val="FFFFFF"/>
               </a:solidFill>
@@ -26155,16 +26876,26 @@
               </a:tabLst>
             </a:pPr>
             <a:r>
-              <a:rPr lang="en-US" sz="3500" b="1" strike="noStrike" spc="-1">
+              <a:rPr lang="en-US" sz="3500" b="1" strike="noStrike" spc="-1" dirty="0">
                 <a:solidFill>
                   <a:srgbClr val="FFFFFF"/>
                 </a:solidFill>
                 <a:latin typeface="Calibri Light"/>
                 <a:ea typeface="Syne Bold"/>
               </a:rPr>
-              <a:t>Backend technológia</a:t>
-            </a:r>
-            <a:endParaRPr lang="hu-HU" sz="3500" b="0" strike="noStrike" spc="-1">
+              <a:t>Backend </a:t>
+            </a:r>
+            <a:r>
+              <a:rPr lang="en-US" sz="3500" b="1" strike="noStrike" spc="-1" dirty="0" err="1">
+                <a:solidFill>
+                  <a:srgbClr val="FFFFFF"/>
+                </a:solidFill>
+                <a:latin typeface="Calibri Light"/>
+                <a:ea typeface="Syne Bold"/>
+              </a:rPr>
+              <a:t>technológia</a:t>
+            </a:r>
+            <a:endParaRPr lang="hu-HU" sz="3500" b="0" strike="noStrike" spc="-1" dirty="0">
               <a:solidFill>
                 <a:srgbClr val="FFFFFF"/>
               </a:solidFill>
@@ -27616,16 +28347,26 @@
               </a:tabLst>
             </a:pPr>
             <a:r>
-              <a:rPr lang="en-US" sz="3500" b="1" strike="noStrike" spc="-1">
+              <a:rPr lang="en-US" sz="3500" b="1" strike="noStrike" spc="-1" dirty="0">
                 <a:solidFill>
                   <a:srgbClr val="FFFFFF"/>
                 </a:solidFill>
                 <a:latin typeface="Calibri Light"/>
                 <a:ea typeface="Syne Bold"/>
               </a:rPr>
-              <a:t>Frontend technológia</a:t>
-            </a:r>
-            <a:endParaRPr lang="hu-HU" sz="3500" b="0" strike="noStrike" spc="-1">
+              <a:t>Frontend </a:t>
+            </a:r>
+            <a:r>
+              <a:rPr lang="en-US" sz="3500" b="1" strike="noStrike" spc="-1" dirty="0" err="1">
+                <a:solidFill>
+                  <a:srgbClr val="FFFFFF"/>
+                </a:solidFill>
+                <a:latin typeface="Calibri Light"/>
+                <a:ea typeface="Syne Bold"/>
+              </a:rPr>
+              <a:t>technológia</a:t>
+            </a:r>
+            <a:endParaRPr lang="hu-HU" sz="3500" b="0" strike="noStrike" spc="-1" dirty="0">
               <a:solidFill>
                 <a:srgbClr val="FFFFFF"/>
               </a:solidFill>

--- a/PPT/MagicFridge_PPT.pptx
+++ b/PPT/MagicFridge_PPT.pptx
@@ -2568,49 +2568,258 @@
           <a:lstStyle/>
           <a:p>
             <a:r>
-              <a:rPr lang="hu-HU" dirty="0"/>
-              <a:t>Backend technológiánk 4 főbb részből épül fel-&gt; Keretrendszer, </a:t>
-            </a:r>
-            <a:r>
-              <a:rPr lang="hu-HU" dirty="0" err="1"/>
+              <a:rPr lang="hu-HU" sz="1200" b="0" i="0" kern="1200" dirty="0">
+                <a:solidFill>
+                  <a:schemeClr val="tx1"/>
+                </a:solidFill>
+                <a:effectLst/>
+                <a:latin typeface="+mn-lt"/>
+                <a:ea typeface="+mn-ea"/>
+                <a:cs typeface="+mn-cs"/>
+              </a:rPr>
+              <a:t>Ez az oldal röviden bemutatja, hogy a rendszer szerveroldali része </a:t>
+            </a:r>
+            <a:r>
+              <a:rPr lang="hu-HU" sz="1200" b="0" i="0" kern="1200" dirty="0" err="1">
+                <a:solidFill>
+                  <a:schemeClr val="tx1"/>
+                </a:solidFill>
+                <a:effectLst/>
+                <a:latin typeface="+mn-lt"/>
+                <a:ea typeface="+mn-ea"/>
+                <a:cs typeface="+mn-cs"/>
+              </a:rPr>
+              <a:t>Laravel</a:t>
+            </a:r>
+            <a:r>
+              <a:rPr lang="hu-HU" sz="1200" b="0" i="0" kern="1200" dirty="0">
+                <a:solidFill>
+                  <a:schemeClr val="tx1"/>
+                </a:solidFill>
+                <a:effectLst/>
+                <a:latin typeface="+mn-lt"/>
+                <a:ea typeface="+mn-ea"/>
+                <a:cs typeface="+mn-cs"/>
+              </a:rPr>
+              <a:t> 12 alapon fut (PHP 8.2), </a:t>
+            </a:r>
+            <a:r>
+              <a:rPr lang="hu-HU" sz="1200" b="0" i="0" kern="1200" dirty="0" err="1">
+                <a:solidFill>
+                  <a:schemeClr val="tx1"/>
+                </a:solidFill>
+                <a:effectLst/>
+                <a:latin typeface="+mn-lt"/>
+                <a:ea typeface="+mn-ea"/>
+                <a:cs typeface="+mn-cs"/>
+              </a:rPr>
+              <a:t>Composer</a:t>
+            </a:r>
+            <a:r>
+              <a:rPr lang="hu-HU" sz="1200" b="0" i="0" kern="1200" dirty="0">
+                <a:solidFill>
+                  <a:schemeClr val="tx1"/>
+                </a:solidFill>
+                <a:effectLst/>
+                <a:latin typeface="+mn-lt"/>
+                <a:ea typeface="+mn-ea"/>
+                <a:cs typeface="+mn-cs"/>
+              </a:rPr>
+              <a:t> csomagkezeléssel és </a:t>
+            </a:r>
+            <a:r>
+              <a:rPr lang="hu-HU" sz="1200" b="0" i="0" kern="1200" dirty="0" err="1">
+                <a:solidFill>
+                  <a:schemeClr val="tx1"/>
+                </a:solidFill>
+                <a:effectLst/>
+                <a:latin typeface="+mn-lt"/>
+                <a:ea typeface="+mn-ea"/>
+                <a:cs typeface="+mn-cs"/>
+              </a:rPr>
+              <a:t>Artisan</a:t>
+            </a:r>
+            <a:r>
+              <a:rPr lang="hu-HU" sz="1200" b="0" i="0" kern="1200" dirty="0">
+                <a:solidFill>
+                  <a:schemeClr val="tx1"/>
+                </a:solidFill>
+                <a:effectLst/>
+                <a:latin typeface="+mn-lt"/>
+                <a:ea typeface="+mn-ea"/>
+                <a:cs typeface="+mn-cs"/>
+              </a:rPr>
+              <a:t> CLI eszközökkel. A </a:t>
+            </a:r>
+            <a:r>
+              <a:rPr lang="hu-HU" sz="1200" b="0" i="0" kern="1200" dirty="0" err="1">
+                <a:solidFill>
+                  <a:schemeClr val="tx1"/>
+                </a:solidFill>
+                <a:effectLst/>
+                <a:latin typeface="+mn-lt"/>
+                <a:ea typeface="+mn-ea"/>
+                <a:cs typeface="+mn-cs"/>
+              </a:rPr>
               <a:t>Routing</a:t>
             </a:r>
             <a:r>
-              <a:rPr lang="hu-HU" dirty="0"/>
-              <a:t>, Vezérlők illetve az </a:t>
-            </a:r>
-            <a:r>
-              <a:rPr lang="hu-HU" dirty="0" err="1"/>
-              <a:t>emailes</a:t>
-            </a:r>
-            <a:r>
-              <a:rPr lang="hu-HU" dirty="0"/>
-              <a:t> visszajelzés. Amint a képen is látható , a Keretrendszerhez </a:t>
-            </a:r>
-            <a:r>
-              <a:rPr lang="hu-HU" dirty="0" err="1"/>
-              <a:t>Laravelt</a:t>
-            </a:r>
-            <a:r>
-              <a:rPr lang="hu-HU" dirty="0"/>
-              <a:t> használtunk PHP-</a:t>
-            </a:r>
-            <a:r>
-              <a:rPr lang="hu-HU" dirty="0" err="1"/>
-              <a:t>val</a:t>
-            </a:r>
-            <a:r>
-              <a:rPr lang="hu-HU" dirty="0"/>
-              <a:t> , </a:t>
-            </a:r>
-            <a:r>
-              <a:rPr lang="hu-HU" dirty="0" err="1"/>
-              <a:t>Routhing</a:t>
-            </a:r>
-            <a:r>
-              <a:rPr lang="hu-HU" dirty="0"/>
-              <a:t>.</a:t>
-            </a:r>
+              <a:rPr lang="hu-HU" sz="1200" b="0" i="0" kern="1200" dirty="0">
+                <a:solidFill>
+                  <a:schemeClr val="tx1"/>
+                </a:solidFill>
+                <a:effectLst/>
+                <a:latin typeface="+mn-lt"/>
+                <a:ea typeface="+mn-ea"/>
+                <a:cs typeface="+mn-cs"/>
+              </a:rPr>
+              <a:t> &amp; Auth rész mutatja, hogy a webes útvonalak a </a:t>
+            </a:r>
+            <a:r>
+              <a:rPr lang="hu-HU" sz="1200" b="0" i="0" kern="1200" dirty="0" err="1">
+                <a:solidFill>
+                  <a:schemeClr val="tx1"/>
+                </a:solidFill>
+                <a:effectLst/>
+                <a:latin typeface="+mn-lt"/>
+                <a:ea typeface="+mn-ea"/>
+                <a:cs typeface="+mn-cs"/>
+              </a:rPr>
+              <a:t>routes</a:t>
+            </a:r>
+            <a:r>
+              <a:rPr lang="hu-HU" sz="1200" b="0" i="0" kern="1200" dirty="0">
+                <a:solidFill>
+                  <a:schemeClr val="tx1"/>
+                </a:solidFill>
+                <a:effectLst/>
+                <a:latin typeface="+mn-lt"/>
+                <a:ea typeface="+mn-ea"/>
+                <a:cs typeface="+mn-cs"/>
+              </a:rPr>
+              <a:t>/</a:t>
+            </a:r>
+            <a:r>
+              <a:rPr lang="hu-HU" sz="1200" b="0" i="0" kern="1200" dirty="0" err="1">
+                <a:solidFill>
+                  <a:schemeClr val="tx1"/>
+                </a:solidFill>
+                <a:effectLst/>
+                <a:latin typeface="+mn-lt"/>
+                <a:ea typeface="+mn-ea"/>
+                <a:cs typeface="+mn-cs"/>
+              </a:rPr>
+              <a:t>web.php</a:t>
+            </a:r>
+            <a:r>
+              <a:rPr lang="hu-HU" sz="1200" b="0" i="0" kern="1200" dirty="0">
+                <a:solidFill>
+                  <a:schemeClr val="tx1"/>
+                </a:solidFill>
+                <a:effectLst/>
+                <a:latin typeface="+mn-lt"/>
+                <a:ea typeface="+mn-ea"/>
+                <a:cs typeface="+mn-cs"/>
+              </a:rPr>
+              <a:t> fájlban vannak, és a beléptetés kezelése külön </a:t>
+            </a:r>
+            <a:r>
+              <a:rPr lang="hu-HU" sz="1200" b="0" i="0" kern="1200" dirty="0" err="1">
+                <a:solidFill>
+                  <a:schemeClr val="tx1"/>
+                </a:solidFill>
+                <a:effectLst/>
+                <a:latin typeface="+mn-lt"/>
+                <a:ea typeface="+mn-ea"/>
+                <a:cs typeface="+mn-cs"/>
+              </a:rPr>
+              <a:t>AuthController</a:t>
+            </a:r>
+            <a:r>
+              <a:rPr lang="hu-HU" sz="1200" b="0" i="0" kern="1200" dirty="0">
+                <a:solidFill>
+                  <a:schemeClr val="tx1"/>
+                </a:solidFill>
+                <a:effectLst/>
+                <a:latin typeface="+mn-lt"/>
+                <a:ea typeface="+mn-ea"/>
+                <a:cs typeface="+mn-cs"/>
+              </a:rPr>
+              <a:t>-ben történik. A Vezérlők blokkban a fő üzleti logikát kezelő kontrollerek szerepelnek (Household, </a:t>
+            </a:r>
+            <a:r>
+              <a:rPr lang="hu-HU" sz="1200" b="0" i="0" kern="1200" dirty="0" err="1">
+                <a:solidFill>
+                  <a:schemeClr val="tx1"/>
+                </a:solidFill>
+                <a:effectLst/>
+                <a:latin typeface="+mn-lt"/>
+                <a:ea typeface="+mn-ea"/>
+                <a:cs typeface="+mn-cs"/>
+              </a:rPr>
+              <a:t>Inventory</a:t>
+            </a:r>
+            <a:r>
+              <a:rPr lang="hu-HU" sz="1200" b="0" i="0" kern="1200" dirty="0">
+                <a:solidFill>
+                  <a:schemeClr val="tx1"/>
+                </a:solidFill>
+                <a:effectLst/>
+                <a:latin typeface="+mn-lt"/>
+                <a:ea typeface="+mn-ea"/>
+                <a:cs typeface="+mn-cs"/>
+              </a:rPr>
+              <a:t>, Recipe, </a:t>
+            </a:r>
+            <a:r>
+              <a:rPr lang="hu-HU" sz="1200" b="0" i="0" kern="1200" dirty="0" err="1">
+                <a:solidFill>
+                  <a:schemeClr val="tx1"/>
+                </a:solidFill>
+                <a:effectLst/>
+                <a:latin typeface="+mn-lt"/>
+                <a:ea typeface="+mn-ea"/>
+                <a:cs typeface="+mn-cs"/>
+              </a:rPr>
+              <a:t>Message</a:t>
+            </a:r>
+            <a:r>
+              <a:rPr lang="hu-HU" sz="1200" b="0" i="0" kern="1200" dirty="0">
+                <a:solidFill>
+                  <a:schemeClr val="tx1"/>
+                </a:solidFill>
+                <a:effectLst/>
+                <a:latin typeface="+mn-lt"/>
+                <a:ea typeface="+mn-ea"/>
+                <a:cs typeface="+mn-cs"/>
+              </a:rPr>
+              <a:t>), amelyek az egyes funkciókért felelnek. A Mail &amp; </a:t>
+            </a:r>
+            <a:r>
+              <a:rPr lang="hu-HU" sz="1200" b="0" i="0" kern="1200" dirty="0" err="1">
+                <a:solidFill>
+                  <a:schemeClr val="tx1"/>
+                </a:solidFill>
+                <a:effectLst/>
+                <a:latin typeface="+mn-lt"/>
+                <a:ea typeface="+mn-ea"/>
+                <a:cs typeface="+mn-cs"/>
+              </a:rPr>
+              <a:t>Queue</a:t>
+            </a:r>
+            <a:r>
+              <a:rPr lang="hu-HU" sz="1200" b="0" i="0" kern="1200">
+                <a:solidFill>
+                  <a:schemeClr val="tx1"/>
+                </a:solidFill>
+                <a:effectLst/>
+                <a:latin typeface="+mn-lt"/>
+                <a:ea typeface="+mn-ea"/>
+                <a:cs typeface="+mn-cs"/>
+              </a:rPr>
+              <a:t> rész azt jelzi, hogy az e-mail értesítések és a hosszabb futású műveletek aszinkron feldolgozással mennek, így gyorsabb marad a felhasználói élmény.</a:t>
+            </a:r>
+            <a:endParaRPr lang="hu-HU" dirty="0"/>
           </a:p>
         </p:txBody>
       </p:sp>
